--- a/reports/investor_deck_TR.pptx
+++ b/reports/investor_deck_TR.pptx
@@ -15,6 +15,8 @@
     <p:sldId id="263" r:id="rId9"/>
     <p:sldId id="264" r:id="rId10"/>
     <p:sldId id="265" r:id="rId11"/>
+    <p:sldId id="266" r:id="rId12"/>
+    <p:sldId id="267" r:id="rId13"/>
   </p:sldIdLst>
   <p:sldSz cx="9144000" cy="5143500" type="screen16x9"/>
   <p:notesSz cx="6858000" cy="9144000"/>
@@ -372,6 +374,420 @@
                   <a:srgbClr val="7DD3FC"/>
                 </a:solidFill>
               </a:rPr>
+              <a:t>Pazar &amp; Kullanım</a:t>
+            </a:r>
+            <a:endParaRPr sz="3600"/>
+          </a:p>
+        </p:txBody>
+      </p:sp>
+      <p:sp>
+        <p:nvSpPr>
+          <p:cNvPr id="5" name="Body"/>
+          <p:cNvSpPr txBox="1"/>
+          <p:nvPr/>
+        </p:nvSpPr>
+        <p:spPr>
+          <a:xfrm>
+            <a:off x="685800" y="1200000"/>
+            <a:ext cx="7772400" cy="3200000"/>
+          </a:xfrm>
+          <a:prstGeom prst="rect">
+            <a:avLst/>
+          </a:prstGeom>
+        </p:spPr>
+        <p:txBody>
+          <a:bodyPr wrap="square"/>
+          <a:lstStyle/>
+          <a:p>
+            <a:pPr>
+              <a:buChar char="•"/>
+            </a:pPr>
+            <a:r>
+              <a:rPr sz="2400">
+                <a:solidFill>
+                  <a:srgbClr val="E2E8F0"/>
+                </a:solidFill>
+              </a:rPr>
+              <a:t>Düzenlemeli kurumlar ve savunma iş akışları</a:t>
+            </a:r>
+            <a:endParaRPr sz="2400"/>
+          </a:p>
+          <a:p>
+            <a:pPr>
+              <a:buChar char="•"/>
+            </a:pPr>
+            <a:r>
+              <a:rPr sz="2400">
+                <a:solidFill>
+                  <a:srgbClr val="E2E8F0"/>
+                </a:solidFill>
+              </a:rPr>
+              <a:t>Düşük bağlantı bölgelerinde cihaz‑içi yardımcılar</a:t>
+            </a:r>
+            <a:endParaRPr sz="2400"/>
+          </a:p>
+          <a:p>
+            <a:pPr>
+              <a:buChar char="•"/>
+            </a:pPr>
+            <a:r>
+              <a:rPr sz="2400">
+                <a:solidFill>
+                  <a:srgbClr val="E2E8F0"/>
+                </a:solidFill>
+              </a:rPr>
+              <a:t>Veri kontrolü olan özel inference stack’leri</a:t>
+            </a:r>
+            <a:endParaRPr sz="2400"/>
+          </a:p>
+        </p:txBody>
+      </p:sp>
+      <p:sp>
+        <p:nvSpPr>
+          <p:cNvPr id="6" name="Footer"/>
+          <p:cNvSpPr txBox="1"/>
+          <p:nvPr/>
+        </p:nvSpPr>
+        <p:spPr>
+          <a:xfrm>
+            <a:off x="457200" y="4700000"/>
+            <a:ext cx="8229600" cy="300000"/>
+          </a:xfrm>
+          <a:prstGeom prst="rect">
+            <a:avLst/>
+          </a:prstGeom>
+        </p:spPr>
+        <p:txBody>
+          <a:bodyPr wrap="square"/>
+          <a:lstStyle/>
+          <a:p>
+            <a:pPr>
+              <a:buNone/>
+            </a:pPr>
+            <a:r>
+              <a:rPr sz="1400">
+                <a:solidFill>
+                  <a:srgbClr val="94A3B8"/>
+                </a:solidFill>
+              </a:rPr>
+              <a:t>Gizli — MertFormer Titan</a:t>
+            </a:r>
+            <a:endParaRPr sz="1400"/>
+          </a:p>
+        </p:txBody>
+      </p:sp>
+    </p:spTree>
+  </p:cSld>
+  <p:clrMapOvr>
+    <a:masterClrMapping/>
+  </p:clrMapOvr>
+</p:sld>
+</file>
+
+<file path=ppt/slides/slide11.xml><?xml version="1.0" encoding="utf-8"?>
+<p:sld xmlns:p="http://schemas.openxmlformats.org/presentationml/2006/main" xmlns:a="http://schemas.openxmlformats.org/drawingml/2006/main" xmlns:r="http://schemas.openxmlformats.org/officeDocument/2006/relationships">
+  <p:cSld>
+    <p:spTree>
+      <p:nvGrpSpPr>
+        <p:cNvPr id="1" name=""/>
+        <p:cNvGrpSpPr/>
+        <p:nvPr/>
+      </p:nvGrpSpPr>
+      <p:grpSpPr>
+        <a:xfrm>
+          <a:off x="0" y="0"/>
+          <a:ext cx="0" cy="0"/>
+        </a:xfrm>
+      </p:grpSpPr>
+      <p:sp>
+        <p:nvSpPr>
+          <p:cNvPr id="2" name="Background"/>
+          <p:cNvSpPr/>
+          <p:nvPr/>
+        </p:nvSpPr>
+        <p:spPr>
+          <a:xfrm>
+            <a:off x="0" y="0"/>
+            <a:ext cx="9144000" cy="5143500"/>
+          </a:xfrm>
+          <a:prstGeom prst="rect">
+            <a:avLst/>
+          </a:prstGeom>
+          <a:solidFill>
+            <a:srgbClr val="0F172A"/>
+          </a:solidFill>
+          <a:ln>
+            <a:noFill/>
+          </a:ln>
+        </p:spPr>
+        <p:txBody>
+          <a:bodyPr/>
+          <a:lstStyle/>
+          <a:p/>
+        </p:txBody>
+      </p:sp>
+      <p:sp>
+        <p:nvSpPr>
+          <p:cNvPr id="3" name="Accent"/>
+          <p:cNvSpPr/>
+          <p:nvPr/>
+        </p:nvSpPr>
+        <p:spPr>
+          <a:xfrm>
+            <a:off x="0" y="0"/>
+            <a:ext cx="9144000" cy="120000"/>
+          </a:xfrm>
+          <a:prstGeom prst="rect">
+            <a:avLst/>
+          </a:prstGeom>
+          <a:solidFill>
+            <a:srgbClr val="22D3EE"/>
+          </a:solidFill>
+          <a:ln>
+            <a:noFill/>
+          </a:ln>
+        </p:spPr>
+        <p:txBody>
+          <a:bodyPr/>
+          <a:lstStyle/>
+          <a:p/>
+        </p:txBody>
+      </p:sp>
+      <p:sp>
+        <p:nvSpPr>
+          <p:cNvPr id="4" name="Title"/>
+          <p:cNvSpPr txBox="1"/>
+          <p:nvPr/>
+        </p:nvSpPr>
+        <p:spPr>
+          <a:xfrm>
+            <a:off x="457200" y="228600"/>
+            <a:ext cx="8229600" cy="685800"/>
+          </a:xfrm>
+          <a:prstGeom prst="rect">
+            <a:avLst/>
+          </a:prstGeom>
+        </p:spPr>
+        <p:txBody>
+          <a:bodyPr wrap="square"/>
+          <a:lstStyle/>
+          <a:p>
+            <a:pPr>
+              <a:buNone/>
+            </a:pPr>
+            <a:r>
+              <a:rPr sz="3600" b="1">
+                <a:solidFill>
+                  <a:srgbClr val="7DD3FC"/>
+                </a:solidFill>
+              </a:rPr>
+              <a:t>Yol Haritası</a:t>
+            </a:r>
+            <a:endParaRPr sz="3600"/>
+          </a:p>
+        </p:txBody>
+      </p:sp>
+      <p:sp>
+        <p:nvSpPr>
+          <p:cNvPr id="5" name="Body"/>
+          <p:cNvSpPr txBox="1"/>
+          <p:nvPr/>
+        </p:nvSpPr>
+        <p:spPr>
+          <a:xfrm>
+            <a:off x="685800" y="1200000"/>
+            <a:ext cx="7772400" cy="3200000"/>
+          </a:xfrm>
+          <a:prstGeom prst="rect">
+            <a:avLst/>
+          </a:prstGeom>
+        </p:spPr>
+        <p:txBody>
+          <a:bodyPr wrap="square"/>
+          <a:lstStyle/>
+          <a:p>
+            <a:pPr>
+              <a:buChar char="•"/>
+            </a:pPr>
+            <a:r>
+              <a:rPr sz="2400">
+                <a:solidFill>
+                  <a:srgbClr val="E2E8F0"/>
+                </a:solidFill>
+              </a:rPr>
+              <a:t>Telemetri gate’leri ile 2.6B master run</a:t>
+            </a:r>
+            <a:endParaRPr sz="2400"/>
+          </a:p>
+          <a:p>
+            <a:pPr>
+              <a:buChar char="•"/>
+            </a:pPr>
+            <a:r>
+              <a:rPr sz="2400">
+                <a:solidFill>
+                  <a:srgbClr val="E2E8F0"/>
+                </a:solidFill>
+              </a:rPr>
+              <a:t>Benchmark doğrulama + pilot dağıtımlar</a:t>
+            </a:r>
+            <a:endParaRPr sz="2400"/>
+          </a:p>
+          <a:p>
+            <a:pPr>
+              <a:buChar char="•"/>
+            </a:pPr>
+            <a:r>
+              <a:rPr sz="2400">
+                <a:solidFill>
+                  <a:srgbClr val="E2E8F0"/>
+                </a:solidFill>
+              </a:rPr>
+              <a:t>Lansman için asset stack + demo video</a:t>
+            </a:r>
+            <a:endParaRPr sz="2400"/>
+          </a:p>
+        </p:txBody>
+      </p:sp>
+      <p:sp>
+        <p:nvSpPr>
+          <p:cNvPr id="6" name="Footer"/>
+          <p:cNvSpPr txBox="1"/>
+          <p:nvPr/>
+        </p:nvSpPr>
+        <p:spPr>
+          <a:xfrm>
+            <a:off x="457200" y="4700000"/>
+            <a:ext cx="8229600" cy="300000"/>
+          </a:xfrm>
+          <a:prstGeom prst="rect">
+            <a:avLst/>
+          </a:prstGeom>
+        </p:spPr>
+        <p:txBody>
+          <a:bodyPr wrap="square"/>
+          <a:lstStyle/>
+          <a:p>
+            <a:pPr>
+              <a:buNone/>
+            </a:pPr>
+            <a:r>
+              <a:rPr sz="1400">
+                <a:solidFill>
+                  <a:srgbClr val="94A3B8"/>
+                </a:solidFill>
+              </a:rPr>
+              <a:t>Gizli — MertFormer Titan</a:t>
+            </a:r>
+            <a:endParaRPr sz="1400"/>
+          </a:p>
+        </p:txBody>
+      </p:sp>
+    </p:spTree>
+  </p:cSld>
+  <p:clrMapOvr>
+    <a:masterClrMapping/>
+  </p:clrMapOvr>
+</p:sld>
+</file>
+
+<file path=ppt/slides/slide12.xml><?xml version="1.0" encoding="utf-8"?>
+<p:sld xmlns:p="http://schemas.openxmlformats.org/presentationml/2006/main" xmlns:a="http://schemas.openxmlformats.org/drawingml/2006/main" xmlns:r="http://schemas.openxmlformats.org/officeDocument/2006/relationships">
+  <p:cSld>
+    <p:spTree>
+      <p:nvGrpSpPr>
+        <p:cNvPr id="1" name=""/>
+        <p:cNvGrpSpPr/>
+        <p:nvPr/>
+      </p:nvGrpSpPr>
+      <p:grpSpPr>
+        <a:xfrm>
+          <a:off x="0" y="0"/>
+          <a:ext cx="0" cy="0"/>
+        </a:xfrm>
+      </p:grpSpPr>
+      <p:sp>
+        <p:nvSpPr>
+          <p:cNvPr id="2" name="Background"/>
+          <p:cNvSpPr/>
+          <p:nvPr/>
+        </p:nvSpPr>
+        <p:spPr>
+          <a:xfrm>
+            <a:off x="0" y="0"/>
+            <a:ext cx="9144000" cy="5143500"/>
+          </a:xfrm>
+          <a:prstGeom prst="rect">
+            <a:avLst/>
+          </a:prstGeom>
+          <a:solidFill>
+            <a:srgbClr val="0F172A"/>
+          </a:solidFill>
+          <a:ln>
+            <a:noFill/>
+          </a:ln>
+        </p:spPr>
+        <p:txBody>
+          <a:bodyPr/>
+          <a:lstStyle/>
+          <a:p/>
+        </p:txBody>
+      </p:sp>
+      <p:sp>
+        <p:nvSpPr>
+          <p:cNvPr id="3" name="Accent"/>
+          <p:cNvSpPr/>
+          <p:nvPr/>
+        </p:nvSpPr>
+        <p:spPr>
+          <a:xfrm>
+            <a:off x="0" y="0"/>
+            <a:ext cx="9144000" cy="120000"/>
+          </a:xfrm>
+          <a:prstGeom prst="rect">
+            <a:avLst/>
+          </a:prstGeom>
+          <a:solidFill>
+            <a:srgbClr val="22D3EE"/>
+          </a:solidFill>
+          <a:ln>
+            <a:noFill/>
+          </a:ln>
+        </p:spPr>
+        <p:txBody>
+          <a:bodyPr/>
+          <a:lstStyle/>
+          <a:p/>
+        </p:txBody>
+      </p:sp>
+      <p:sp>
+        <p:nvSpPr>
+          <p:cNvPr id="4" name="Title"/>
+          <p:cNvSpPr txBox="1"/>
+          <p:nvPr/>
+        </p:nvSpPr>
+        <p:spPr>
+          <a:xfrm>
+            <a:off x="457200" y="228600"/>
+            <a:ext cx="8229600" cy="685800"/>
+          </a:xfrm>
+          <a:prstGeom prst="rect">
+            <a:avLst/>
+          </a:prstGeom>
+        </p:spPr>
+        <p:txBody>
+          <a:bodyPr wrap="square"/>
+          <a:lstStyle/>
+          <a:p>
+            <a:pPr>
+              <a:buNone/>
+            </a:pPr>
+            <a:r>
+              <a:rPr sz="3600" b="1">
+                <a:solidFill>
+                  <a:srgbClr val="7DD3FC"/>
+                </a:solidFill>
+              </a:rPr>
               <a:t>Talep</a:t>
             </a:r>
             <a:endParaRPr sz="3600"/>
@@ -1821,7 +2237,7 @@
                   <a:srgbClr val="7DD3FC"/>
                 </a:solidFill>
               </a:rPr>
-              <a:t>Pazar &amp; Kullanım</a:t>
+              <a:t>Compute İhtiyacı &amp; Plan</a:t>
             </a:r>
             <a:endParaRPr sz="3600"/>
           </a:p>
@@ -1855,35 +2271,35 @@
                   <a:srgbClr val="E2E8F0"/>
                 </a:solidFill>
               </a:rPr>
-              <a:t>Düzenlemeli kurumlar ve savunma iş akışları</a:t>
-            </a:r>
-            <a:endParaRPr sz="2400"/>
-          </a:p>
-          <a:p>
-            <a:pPr>
-              <a:buChar char="•"/>
-            </a:pPr>
-            <a:r>
-              <a:rPr sz="2400">
-                <a:solidFill>
-                  <a:srgbClr val="E2E8F0"/>
-                </a:solidFill>
-              </a:rPr>
-              <a:t>Düşük bağlantı bölgelerinde cihaz‑içi yardımcılar</a:t>
-            </a:r>
-            <a:endParaRPr sz="2400"/>
-          </a:p>
-          <a:p>
-            <a:pPr>
-              <a:buChar char="•"/>
-            </a:pPr>
-            <a:r>
-              <a:rPr sz="2400">
-                <a:solidFill>
-                  <a:srgbClr val="E2E8F0"/>
-                </a:solidFill>
-              </a:rPr>
-              <a:t>Veri kontrolü olan özel inference stack’leri</a:t>
+              <a:t>Master run için multi-GPU kredisi (A100/H100 sınıfı)</a:t>
+            </a:r>
+            <a:endParaRPr sz="2400"/>
+          </a:p>
+          <a:p>
+            <a:pPr>
+              <a:buChar char="•"/>
+            </a:pPr>
+            <a:r>
+              <a:rPr sz="2400">
+                <a:solidFill>
+                  <a:srgbClr val="E2E8F0"/>
+                </a:solidFill>
+              </a:rPr>
+              <a:t>Aşamalı koşu: full 1MB gate → master run → benchmark</a:t>
+            </a:r>
+            <a:endParaRPr sz="2400"/>
+          </a:p>
+          <a:p>
+            <a:pPr>
+              <a:buChar char="•"/>
+            </a:pPr>
+            <a:r>
+              <a:rPr sz="2400">
+                <a:solidFill>
+                  <a:srgbClr val="E2E8F0"/>
+                </a:solidFill>
+              </a:rPr>
+              <a:t>Çıktılar: checkpoint, log, eval sonuçları</a:t>
             </a:r>
             <a:endParaRPr sz="2400"/>
           </a:p>
@@ -2028,7 +2444,7 @@
                   <a:srgbClr val="7DD3FC"/>
                 </a:solidFill>
               </a:rPr>
-              <a:t>Yol Haritası</a:t>
+              <a:t>Pilot / Pazara Çıkış</a:t>
             </a:r>
             <a:endParaRPr sz="3600"/>
           </a:p>
@@ -2062,35 +2478,35 @@
                   <a:srgbClr val="E2E8F0"/>
                 </a:solidFill>
               </a:rPr>
-              <a:t>Telemetri gate’leri ile 2.6B master run</a:t>
-            </a:r>
-            <a:endParaRPr sz="2400"/>
-          </a:p>
-          <a:p>
-            <a:pPr>
-              <a:buChar char="•"/>
-            </a:pPr>
-            <a:r>
-              <a:rPr sz="2400">
-                <a:solidFill>
-                  <a:srgbClr val="E2E8F0"/>
-                </a:solidFill>
-              </a:rPr>
-              <a:t>Benchmark doğrulama + pilot dağıtımlar</a:t>
-            </a:r>
-            <a:endParaRPr sz="2400"/>
-          </a:p>
-          <a:p>
-            <a:pPr>
-              <a:buChar char="•"/>
-            </a:pPr>
-            <a:r>
-              <a:rPr sz="2400">
-                <a:solidFill>
-                  <a:srgbClr val="E2E8F0"/>
-                </a:solidFill>
-              </a:rPr>
-              <a:t>Lansman için asset stack + demo video</a:t>
+              <a:t>Düzenlemeli ekipler için offline PoC (savunma/hukuk/finans)</a:t>
+            </a:r>
+            <a:endParaRPr sz="2400"/>
+          </a:p>
+          <a:p>
+            <a:pPr>
+              <a:buChar char="•"/>
+            </a:pPr>
+            <a:r>
+              <a:rPr sz="2400">
+                <a:solidFill>
+                  <a:srgbClr val="E2E8F0"/>
+                </a:solidFill>
+              </a:rPr>
+              <a:t>2–4 haftalık pilot, net başarı kriterleriyle</a:t>
+            </a:r>
+            <a:endParaRPr sz="2400"/>
+          </a:p>
+          <a:p>
+            <a:pPr>
+              <a:buChar char="•"/>
+            </a:pPr>
+            <a:r>
+              <a:rPr sz="2400">
+                <a:solidFill>
+                  <a:srgbClr val="E2E8F0"/>
+                </a:solidFill>
+              </a:rPr>
+              <a:t>Pilot sonrası: ücretli dağıtım + destek</a:t>
             </a:r>
             <a:endParaRPr sz="2400"/>
           </a:p>

--- a/reports/investor_deck_TR.pptx
+++ b/reports/investor_deck_TR.pptx
@@ -1475,6 +1475,20 @@
             </a:r>
             <a:endParaRPr sz="2400"/>
           </a:p>
+          <a:p>
+            <a:pPr>
+              <a:buChar char="•"/>
+            </a:pPr>
+            <a:r>
+              <a:rPr sz="2400">
+                <a:solidFill>
+                  <a:srgbClr val="E2E8F0"/>
+                </a:solidFill>
+              </a:rPr>
+              <a:t>Edge dağıtım için SDK + CLI</a:t>
+            </a:r>
+            <a:endParaRPr sz="2400"/>
+          </a:p>
         </p:txBody>
       </p:sp>
       <p:sp>

--- a/reports/investor_deck_TR.pptx
+++ b/reports/investor_deck_TR.pptx
@@ -201,7 +201,21 @@
                   <a:srgbClr val="E2E8F0"/>
                 </a:solidFill>
               </a:rPr>
-              <a:t>Edge-native kodlama modeli (2.6B hedef)</a:t>
+              <a:t>Edge-native kodlama modeli (2.64B tasarım hedefi)</a:t>
+            </a:r>
+            <a:endParaRPr sz="2400"/>
+          </a:p>
+          <a:p>
+            <a:pPr>
+              <a:buChar char="•"/>
+            </a:pPr>
+            <a:r>
+              <a:rPr sz="2400">
+                <a:solidFill>
+                  <a:srgbClr val="E2E8F0"/>
+                </a:solidFill>
+              </a:rPr>
+              <a:t>Mevcut build runtime toplamı: ~3.70B</a:t>
             </a:r>
             <a:endParaRPr sz="2400"/>
           </a:p>
@@ -615,7 +629,7 @@
                   <a:srgbClr val="E2E8F0"/>
                 </a:solidFill>
               </a:rPr>
-              <a:t>Telemetri gate’leri ile 2.6B master run</a:t>
+              <a:t>Telemetri gate’leri ile 2.64B tasarım hedefli master run</a:t>
             </a:r>
             <a:endParaRPr sz="2400"/>
           </a:p>
@@ -1443,7 +1457,7 @@
                   <a:srgbClr val="E2E8F0"/>
                 </a:solidFill>
               </a:rPr>
-              <a:t>Kodlama için 2.6B parametre hedef model</a:t>
+              <a:t>Kodlama için 2.64B tasarım hedefli model</a:t>
             </a:r>
             <a:endParaRPr sz="2400"/>
           </a:p>

--- a/reports/investor_deck_TR.pptx
+++ b/reports/investor_deck_TR.pptx
@@ -657,7 +657,7 @@
                   <a:srgbClr val="E2E8F0"/>
                 </a:solidFill>
               </a:rPr>
-              <a:t>Lansman için asset stack + demo video</a:t>
+              <a:t>Lansman için asset stack + materyaller</a:t>
             </a:r>
             <a:endParaRPr sz="2400"/>
           </a:p>

--- a/reports/investor_deck_TR.pptx
+++ b/reports/investor_deck_TR.pptx
@@ -17,6 +17,7 @@
     <p:sldId id="265" r:id="rId11"/>
     <p:sldId id="266" r:id="rId12"/>
     <p:sldId id="267" r:id="rId13"/>
+    <p:sldId id="268" r:id="rId14"/>
   </p:sldIdLst>
   <p:sldSz cx="9144000" cy="5143500" type="screen16x9"/>
   <p:notesSz cx="6858000" cy="9144000"/>
@@ -912,6 +913,76 @@
 </p:sld>
 </file>
 
+<file path=ppt/slides/slide13.xml><?xml version="1.0" encoding="utf-8"?>
+<p:sld xmlns:a="http://schemas.openxmlformats.org/drawingml/2006/main" xmlns:p="http://schemas.openxmlformats.org/presentationml/2006/main" xmlns:r="http://schemas.openxmlformats.org/officeDocument/2006/relationships">
+  <p:cSld>
+    <p:spTree>
+      <p:nvGrpSpPr>
+        <p:cNvPr id="1" name=""/>
+        <p:cNvGrpSpPr/>
+        <p:nvPr/>
+      </p:nvGrpSpPr>
+      <p:grpSpPr/>
+      <p:sp>
+        <p:nvSpPr>
+          <p:cNvPr id="2" name="TextBox 1"/>
+          <p:cNvSpPr txBox="1"/>
+          <p:nvPr/>
+        </p:nvSpPr>
+        <p:spPr>
+          <a:xfrm>
+            <a:off x="548640" y="365760"/>
+            <a:ext cx="10972800" cy="731520"/>
+          </a:xfrm>
+          <a:prstGeom prst="rect">
+            <a:avLst/>
+          </a:prstGeom>
+          <a:noFill/>
+        </p:spPr>
+        <p:txBody>
+          <a:bodyPr wrap="none">
+            <a:spAutoFit/>
+          </a:bodyPr>
+          <a:lstStyle/>
+          <a:p>
+            <a:r>
+              <a:t>Dedup pipeline aktif (global/sahne kapsamı)</a:t>
+            </a:r>
+          </a:p>
+          <a:p>
+            <a:pPr/>
+            <a:r>
+              <a:t>MoE paralel dispatch yolu (sequential fallback korunur)</a:t>
+            </a:r>
+          </a:p>
+          <a:p>
+            <a:pPr/>
+            <a:r>
+              <a:t>Liquid/CfC fast-path opt-in (verimlilik)</a:t>
+            </a:r>
+          </a:p>
+          <a:p>
+            <a:pPr/>
+            <a:r>
+              <a:t>Eğitim kapıları + SOP kanıtları güçlendirildi</a:t>
+            </a:r>
+          </a:p>
+          <a:p>
+            <a:pPr/>
+            <a:r>
+              <a:t>İddia sınırı aynı (eğitim öncesi, benchmark yok)</a:t>
+            </a:r>
+          </a:p>
+        </p:txBody>
+      </p:sp>
+    </p:spTree>
+  </p:cSld>
+  <p:clrMapOvr>
+    <a:masterClrMapping/>
+  </p:clrMapOvr>
+</p:sld>
+</file>
+
 <file path=ppt/slides/slide2.xml><?xml version="1.0" encoding="utf-8"?>
 <p:sld xmlns:p="http://schemas.openxmlformats.org/presentationml/2006/main" xmlns:a="http://schemas.openxmlformats.org/drawingml/2006/main" xmlns:r="http://schemas.openxmlformats.org/officeDocument/2006/relationships">
   <p:cSld>

--- a/reports/investor_deck_TR.pptx
+++ b/reports/investor_deck_TR.pptx
@@ -18,6 +18,7 @@
     <p:sldId id="266" r:id="rId12"/>
     <p:sldId id="267" r:id="rId13"/>
     <p:sldId id="268" r:id="rId14"/>
+    <p:sldId id="269" r:id="rId15"/>
   </p:sldIdLst>
   <p:sldSz cx="9144000" cy="5143500" type="screen16x9"/>
   <p:notesSz cx="6858000" cy="9144000"/>
@@ -983,6 +984,76 @@
 </p:sld>
 </file>
 
+<file path=ppt/slides/slide14.xml><?xml version="1.0" encoding="utf-8"?>
+<p:sld xmlns:a="http://schemas.openxmlformats.org/drawingml/2006/main" xmlns:p="http://schemas.openxmlformats.org/presentationml/2006/main" xmlns:r="http://schemas.openxmlformats.org/officeDocument/2006/relationships">
+  <p:cSld>
+    <p:spTree>
+      <p:nvGrpSpPr>
+        <p:cNvPr id="1" name=""/>
+        <p:cNvGrpSpPr/>
+        <p:nvPr/>
+      </p:nvGrpSpPr>
+      <p:grpSpPr/>
+      <p:sp>
+        <p:nvSpPr>
+          <p:cNvPr id="2" name="TextBox 1"/>
+          <p:cNvSpPr txBox="1"/>
+          <p:nvPr/>
+        </p:nvSpPr>
+        <p:spPr>
+          <a:xfrm>
+            <a:off x="548640" y="365760"/>
+            <a:ext cx="10972800" cy="731520"/>
+          </a:xfrm>
+          <a:prstGeom prst="rect">
+            <a:avLst/>
+          </a:prstGeom>
+          <a:noFill/>
+        </p:spPr>
+        <p:txBody>
+          <a:bodyPr wrap="none">
+            <a:spAutoFit/>
+          </a:bodyPr>
+          <a:lstStyle/>
+          <a:p>
+            <a:r>
+              <a:t>Dedup pipeline aktif (global/sahne kapsamı)</a:t>
+            </a:r>
+          </a:p>
+          <a:p>
+            <a:pPr/>
+            <a:r>
+              <a:t>MoE paralel dispatch yolu (sequential fallback korunur)</a:t>
+            </a:r>
+          </a:p>
+          <a:p>
+            <a:pPr/>
+            <a:r>
+              <a:t>Liquid/CfC fast-path opt-in (verimlilik)</a:t>
+            </a:r>
+          </a:p>
+          <a:p>
+            <a:pPr/>
+            <a:r>
+              <a:t>Eğitim kapıları + SOP kanıtları güçlendirildi</a:t>
+            </a:r>
+          </a:p>
+          <a:p>
+            <a:pPr/>
+            <a:r>
+              <a:t>İddia sınırı aynı (eğitim öncesi, benchmark yok)</a:t>
+            </a:r>
+          </a:p>
+        </p:txBody>
+      </p:sp>
+    </p:spTree>
+  </p:cSld>
+  <p:clrMapOvr>
+    <a:masterClrMapping/>
+  </p:clrMapOvr>
+</p:sld>
+</file>
+
 <file path=ppt/slides/slide2.xml><?xml version="1.0" encoding="utf-8"?>
 <p:sld xmlns:p="http://schemas.openxmlformats.org/presentationml/2006/main" xmlns:a="http://schemas.openxmlformats.org/drawingml/2006/main" xmlns:r="http://schemas.openxmlformats.org/officeDocument/2006/relationships">
   <p:cSld>
